--- a/effect-tests/style-library-v1/samples/style-sample-investor-narrative.pptx
+++ b/effect-tests/style-library-v1/samples/style-sample-investor-narrative.pptx
@@ -937,17 +937,17 @@
         </p:nvSpPr>
         <p:spPr>
           <a:xfrm>
-            <a:off x="6583680" y="1005840"/>
-            <a:ext cx="4389120" cy="3474720"/>
+            <a:off x="10195560" y="841248"/>
+            <a:ext cx="685800" cy="530352"/>
           </a:xfrm>
           <a:prstGeom prst="line">
             <a:avLst/>
           </a:prstGeom>
           <a:noFill/>
-          <a:ln w="19050">
+          <a:ln w="15240">
             <a:solidFill>
               <a:srgbClr val="F6C85F">
-                <a:alpha val="58000"/>
+                <a:alpha val="42000"/>
               </a:srgbClr>
             </a:solidFill>
             <a:prstDash val="solid"/>
@@ -962,17 +962,17 @@
         </p:nvSpPr>
         <p:spPr>
           <a:xfrm>
-            <a:off x="7040880" y="5303520"/>
-            <a:ext cx="3657600" cy="-3749040"/>
+            <a:off x="10378440" y="5669280"/>
+            <a:ext cx="493776" cy="-384048"/>
           </a:xfrm>
           <a:prstGeom prst="line">
             <a:avLst/>
           </a:prstGeom>
           <a:noFill/>
-          <a:ln w="15240">
+          <a:ln w="12700">
             <a:solidFill>
               <a:srgbClr val="08111F">
-                <a:alpha val="65000"/>
+                <a:alpha val="38000"/>
               </a:srgbClr>
             </a:solidFill>
             <a:prstDash val="solid"/>

--- a/effect-tests/style-library-v1/samples/style-sample-investor-narrative.pptx
+++ b/effect-tests/style-library-v1/samples/style-sample-investor-narrative.pptx
@@ -902,26 +902,52 @@
           </a:ln>
         </p:spPr>
       </p:sp>
-      <p:sp>
-        <p:nvSpPr>
-          <p:cNvPr id="3" name="Shape 1"/>
-          <p:cNvSpPr/>
-          <p:nvPr/>
-        </p:nvSpPr>
+      <p:pic>
+        <p:nvPicPr>
+          <p:cNvPr id="3" name="Image 0" descr="/Users/dw/Desktop/codex-visual-ppt-deck-builder/effect-tests/style-library-v1/assets/background-investor-narrative.png">    </p:cNvPr>
+          <p:cNvPicPr>
+            <a:picLocks noChangeAspect="1"/>
+          </p:cNvPicPr>
+          <p:nvPr/>
+        </p:nvPicPr>
+        <p:blipFill>
+          <a:blip r:embed="rId1"/>
+          <a:stretch>
+            <a:fillRect/>
+          </a:stretch>
+        </p:blipFill>
         <p:spPr>
           <a:xfrm>
             <a:off x="0" y="0"/>
-            <a:ext cx="82296" cy="6858000"/>
-          </a:xfrm>
-          <a:prstGeom prst="rect">
-            <a:avLst/>
-          </a:prstGeom>
-          <a:solidFill>
-            <a:srgbClr val="08111F"/>
+            <a:ext cx="12191695" cy="6858000"/>
+          </a:xfrm>
+          <a:prstGeom prst="rect">
+            <a:avLst/>
+          </a:prstGeom>
+        </p:spPr>
+      </p:pic>
+      <p:sp>
+        <p:nvSpPr>
+          <p:cNvPr id="4" name="Shape 1"/>
+          <p:cNvSpPr/>
+          <p:nvPr/>
+        </p:nvSpPr>
+        <p:spPr>
+          <a:xfrm>
+            <a:off x="0" y="0"/>
+            <a:ext cx="12191695" cy="6858000"/>
+          </a:xfrm>
+          <a:prstGeom prst="rect">
+            <a:avLst/>
+          </a:prstGeom>
+          <a:solidFill>
+            <a:srgbClr val="08111F">
+              <a:alpha val="76000"/>
+            </a:srgbClr>
           </a:solidFill>
           <a:ln w="12700">
             <a:solidFill>
-              <a:srgbClr val="08111F">
+              <a:srgbClr val="333333">
                 <a:alpha val="0"/>
               </a:srgbClr>
             </a:solidFill>
@@ -931,23 +957,23 @@
       </p:sp>
       <p:sp>
         <p:nvSpPr>
-          <p:cNvPr id="4" name="Shape 2"/>
-          <p:cNvSpPr/>
-          <p:nvPr/>
-        </p:nvSpPr>
-        <p:spPr>
-          <a:xfrm>
-            <a:off x="10195560" y="841248"/>
-            <a:ext cx="685800" cy="530352"/>
+          <p:cNvPr id="5" name="Shape 2"/>
+          <p:cNvSpPr/>
+          <p:nvPr/>
+        </p:nvSpPr>
+        <p:spPr>
+          <a:xfrm>
+            <a:off x="676656" y="1719072"/>
+            <a:ext cx="1170432" cy="0"/>
           </a:xfrm>
           <a:prstGeom prst="line">
             <a:avLst/>
           </a:prstGeom>
           <a:noFill/>
-          <a:ln w="15240">
+          <a:ln w="16510">
             <a:solidFill>
               <a:srgbClr val="F6C85F">
-                <a:alpha val="42000"/>
+                <a:alpha val="80000"/>
               </a:srgbClr>
             </a:solidFill>
             <a:prstDash val="solid"/>
@@ -956,39 +982,14 @@
       </p:sp>
       <p:sp>
         <p:nvSpPr>
-          <p:cNvPr id="5" name="Shape 3"/>
-          <p:cNvSpPr/>
-          <p:nvPr/>
-        </p:nvSpPr>
-        <p:spPr>
-          <a:xfrm>
-            <a:off x="10378440" y="5669280"/>
-            <a:ext cx="493776" cy="-384048"/>
-          </a:xfrm>
-          <a:prstGeom prst="line">
-            <a:avLst/>
-          </a:prstGeom>
-          <a:noFill/>
-          <a:ln w="12700">
-            <a:solidFill>
-              <a:srgbClr val="08111F">
-                <a:alpha val="38000"/>
-              </a:srgbClr>
-            </a:solidFill>
-            <a:prstDash val="solid"/>
-          </a:ln>
-        </p:spPr>
-      </p:sp>
-      <p:sp>
-        <p:nvSpPr>
-          <p:cNvPr id="6" name="Text 4"/>
-          <p:cNvSpPr/>
-          <p:nvPr/>
-        </p:nvSpPr>
-        <p:spPr>
-          <a:xfrm>
-            <a:off x="658368" y="411480"/>
-            <a:ext cx="2011680" cy="164592"/>
+          <p:cNvPr id="6" name="Text 3"/>
+          <p:cNvSpPr/>
+          <p:nvPr/>
+        </p:nvSpPr>
+        <p:spPr>
+          <a:xfrm>
+            <a:off x="658368" y="402336"/>
+            <a:ext cx="2468880" cy="164592"/>
           </a:xfrm>
           <a:prstGeom prst="rect">
             <a:avLst/>
@@ -1010,11 +1011,11 @@
                 <a:solidFill>
                   <a:srgbClr val="08111F"/>
                 </a:solidFill>
-                <a:latin typeface="PingFang SC" pitchFamily="34" charset="0"/>
-                <a:ea typeface="PingFang SC" pitchFamily="34" charset="-122"/>
-                <a:cs typeface="PingFang SC" pitchFamily="34" charset="-120"/>
+                <a:latin typeface="Avenir Next" pitchFamily="34" charset="0"/>
+                <a:ea typeface="Avenir Next" pitchFamily="34" charset="-122"/>
+                <a:cs typeface="Avenir Next" pitchFamily="34" charset="-120"/>
               </a:rPr>
-              <a:t>2026 RESEARCH</a:t>
+              <a:t>INVESTOR EDITION</a:t>
             </a:r>
             <a:endParaRPr lang="en-US" sz="750" dirty="0"/>
           </a:p>
@@ -1022,14 +1023,14 @@
       </p:sp>
       <p:sp>
         <p:nvSpPr>
-          <p:cNvPr id="7" name="Text 5"/>
-          <p:cNvSpPr/>
-          <p:nvPr/>
-        </p:nvSpPr>
-        <p:spPr>
-          <a:xfrm>
-            <a:off x="658368" y="685800"/>
-            <a:ext cx="5212080" cy="777240"/>
+          <p:cNvPr id="7" name="Text 4"/>
+          <p:cNvSpPr/>
+          <p:nvPr/>
+        </p:nvSpPr>
+        <p:spPr>
+          <a:xfrm>
+            <a:off x="658368" y="731520"/>
+            <a:ext cx="5212080" cy="822960"/>
           </a:xfrm>
           <a:prstGeom prst="rect">
             <a:avLst/>
@@ -1051,9 +1052,9 @@
                 <a:solidFill>
                   <a:srgbClr val="FFFFFF"/>
                 </a:solidFill>
-                <a:latin typeface="PingFang SC" pitchFamily="34" charset="0"/>
-                <a:ea typeface="PingFang SC" pitchFamily="34" charset="-122"/>
-                <a:cs typeface="PingFang SC" pitchFamily="34" charset="-120"/>
+                <a:latin typeface="Heiti SC" pitchFamily="34" charset="0"/>
+                <a:ea typeface="Heiti SC" pitchFamily="34" charset="-122"/>
+                <a:cs typeface="Heiti SC" pitchFamily="34" charset="-120"/>
               </a:rPr>
               <a:t>2026 AI 应用趋势调研</a:t>
             </a:r>
@@ -1063,14 +1064,14 @@
       </p:sp>
       <p:sp>
         <p:nvSpPr>
-          <p:cNvPr id="8" name="Text 6"/>
-          <p:cNvSpPr/>
-          <p:nvPr/>
-        </p:nvSpPr>
-        <p:spPr>
-          <a:xfrm>
-            <a:off x="694944" y="1453896"/>
-            <a:ext cx="4114800" cy="228600"/>
+          <p:cNvPr id="8" name="Text 5"/>
+          <p:cNvSpPr/>
+          <p:nvPr/>
+        </p:nvSpPr>
+        <p:spPr>
+          <a:xfrm>
+            <a:off x="694944" y="1444752"/>
+            <a:ext cx="4389120" cy="219456"/>
           </a:xfrm>
           <a:prstGeom prst="rect">
             <a:avLst/>
@@ -1088,7 +1089,7 @@
               <a:buNone/>
             </a:pPr>
             <a:r>
-              <a:rPr lang="en-US" sz="1050" b="1" dirty="0">
+              <a:rPr lang="en-US" sz="1020" b="1" dirty="0">
                 <a:solidFill>
                   <a:srgbClr val="08111F"/>
                 </a:solidFill>
@@ -1098,13 +1099,13 @@
               </a:rPr>
               <a:t>融资路演样张</a:t>
             </a:r>
-            <a:endParaRPr lang="en-US" sz="1050" dirty="0"/>
+            <a:endParaRPr lang="en-US" sz="1020" dirty="0"/>
           </a:p>
         </p:txBody>
       </p:sp>
       <p:sp>
         <p:nvSpPr>
-          <p:cNvPr id="9" name="Shape 7"/>
+          <p:cNvPr id="9" name="Shape 6"/>
           <p:cNvSpPr/>
           <p:nvPr/>
         </p:nvSpPr>
@@ -1119,8 +1120,8 @@
           <a:noFill/>
           <a:ln w="15240">
             <a:solidFill>
-              <a:srgbClr val="08111F">
-                <a:alpha val="65000"/>
+              <a:srgbClr val="F6C85F">
+                <a:alpha val="82000"/>
               </a:srgbClr>
             </a:solidFill>
             <a:prstDash val="solid"/>
@@ -1129,14 +1130,14 @@
       </p:sp>
       <p:sp>
         <p:nvSpPr>
-          <p:cNvPr id="10" name="Text 8"/>
+          <p:cNvPr id="10" name="Text 7"/>
           <p:cNvSpPr/>
           <p:nvPr/>
         </p:nvSpPr>
         <p:spPr>
           <a:xfrm>
             <a:off x="749808" y="2148840"/>
-            <a:ext cx="1645920" cy="256032"/>
+            <a:ext cx="2011680" cy="256032"/>
           </a:xfrm>
           <a:prstGeom prst="rect">
             <a:avLst/>
@@ -1170,14 +1171,14 @@
       </p:sp>
       <p:sp>
         <p:nvSpPr>
-          <p:cNvPr id="11" name="Text 9"/>
+          <p:cNvPr id="11" name="Text 8"/>
           <p:cNvSpPr/>
           <p:nvPr/>
         </p:nvSpPr>
         <p:spPr>
           <a:xfrm>
             <a:off x="749808" y="2651760"/>
-            <a:ext cx="4480560" cy="603504"/>
+            <a:ext cx="4480560" cy="640080"/>
           </a:xfrm>
           <a:prstGeom prst="rect">
             <a:avLst/>
@@ -1211,7 +1212,7 @@
       </p:sp>
       <p:sp>
         <p:nvSpPr>
-          <p:cNvPr id="12" name="Shape 10"/>
+          <p:cNvPr id="12" name="Shape 9"/>
           <p:cNvSpPr/>
           <p:nvPr/>
         </p:nvSpPr>
@@ -1238,7 +1239,7 @@
       </p:sp>
       <p:sp>
         <p:nvSpPr>
-          <p:cNvPr id="13" name="Text 11"/>
+          <p:cNvPr id="13" name="Text 10"/>
           <p:cNvSpPr/>
           <p:nvPr/>
         </p:nvSpPr>
@@ -1279,7 +1280,7 @@
       </p:sp>
       <p:sp>
         <p:nvSpPr>
-          <p:cNvPr id="14" name="Shape 12"/>
+          <p:cNvPr id="14" name="Shape 11"/>
           <p:cNvSpPr/>
           <p:nvPr/>
         </p:nvSpPr>
@@ -1306,7 +1307,7 @@
       </p:sp>
       <p:sp>
         <p:nvSpPr>
-          <p:cNvPr id="15" name="Text 13"/>
+          <p:cNvPr id="15" name="Text 12"/>
           <p:cNvSpPr/>
           <p:nvPr/>
         </p:nvSpPr>
@@ -1347,7 +1348,7 @@
       </p:sp>
       <p:sp>
         <p:nvSpPr>
-          <p:cNvPr id="16" name="Shape 14"/>
+          <p:cNvPr id="16" name="Shape 13"/>
           <p:cNvSpPr/>
           <p:nvPr/>
         </p:nvSpPr>
@@ -1374,7 +1375,7 @@
       </p:sp>
       <p:sp>
         <p:nvSpPr>
-          <p:cNvPr id="17" name="Text 15"/>
+          <p:cNvPr id="17" name="Text 14"/>
           <p:cNvSpPr/>
           <p:nvPr/>
         </p:nvSpPr>
@@ -1415,7 +1416,7 @@
       </p:sp>
       <p:sp>
         <p:nvSpPr>
-          <p:cNvPr id="18" name="Shape 16"/>
+          <p:cNvPr id="18" name="Shape 15"/>
           <p:cNvSpPr/>
           <p:nvPr/>
         </p:nvSpPr>
@@ -1430,8 +1431,8 @@
           <a:noFill/>
           <a:ln w="25400">
             <a:solidFill>
-              <a:srgbClr val="08111F">
-                <a:alpha val="78000"/>
+              <a:srgbClr val="F6C85F">
+                <a:alpha val="90000"/>
               </a:srgbClr>
             </a:solidFill>
             <a:prstDash val="solid"/>
@@ -1440,14 +1441,14 @@
       </p:sp>
       <p:sp>
         <p:nvSpPr>
-          <p:cNvPr id="19" name="Text 17"/>
+          <p:cNvPr id="19" name="Text 16"/>
           <p:cNvSpPr/>
           <p:nvPr/>
         </p:nvSpPr>
         <p:spPr>
           <a:xfrm>
             <a:off x="749808" y="5111496"/>
-            <a:ext cx="1527048" cy="329184"/>
+            <a:ext cx="1545336" cy="329184"/>
           </a:xfrm>
           <a:prstGeom prst="rect">
             <a:avLst/>
@@ -1465,30 +1466,30 @@
               <a:buNone/>
             </a:pPr>
             <a:r>
-              <a:rPr lang="en-US" sz="1800" b="1" dirty="0">
+              <a:rPr lang="en-US" sz="1850" b="1" dirty="0">
                 <a:solidFill>
-                  <a:srgbClr val="08111F"/>
+                  <a:srgbClr val="F6C85F"/>
                 </a:solidFill>
-                <a:latin typeface="PingFang SC" pitchFamily="34" charset="0"/>
-                <a:ea typeface="PingFang SC" pitchFamily="34" charset="-122"/>
-                <a:cs typeface="PingFang SC" pitchFamily="34" charset="-120"/>
+                <a:latin typeface="Heiti SC" pitchFamily="34" charset="0"/>
+                <a:ea typeface="Heiti SC" pitchFamily="34" charset="-122"/>
+                <a:cs typeface="Heiti SC" pitchFamily="34" charset="-120"/>
               </a:rPr>
               <a:t>$1.2B</a:t>
             </a:r>
-            <a:endParaRPr lang="en-US" sz="1800" dirty="0"/>
+            <a:endParaRPr lang="en-US" sz="1850" dirty="0"/>
           </a:p>
         </p:txBody>
       </p:sp>
       <p:sp>
         <p:nvSpPr>
-          <p:cNvPr id="20" name="Text 18"/>
+          <p:cNvPr id="20" name="Text 17"/>
           <p:cNvSpPr/>
           <p:nvPr/>
         </p:nvSpPr>
         <p:spPr>
           <a:xfrm>
             <a:off x="749808" y="5477256"/>
-            <a:ext cx="1527048" cy="228600"/>
+            <a:ext cx="1545336" cy="228600"/>
           </a:xfrm>
           <a:prstGeom prst="rect">
             <a:avLst/>
@@ -1508,7 +1509,7 @@
             <a:r>
               <a:rPr lang="en-US" sz="700" b="1" dirty="0">
                 <a:solidFill>
-                  <a:srgbClr val="FFFFFF"/>
+                  <a:srgbClr val="E6EEF8"/>
                 </a:solidFill>
                 <a:latin typeface="PingFang SC" pitchFamily="34" charset="0"/>
                 <a:ea typeface="PingFang SC" pitchFamily="34" charset="-122"/>
@@ -1522,7 +1523,7 @@
       </p:sp>
       <p:sp>
         <p:nvSpPr>
-          <p:cNvPr id="21" name="Shape 19"/>
+          <p:cNvPr id="21" name="Shape 18"/>
           <p:cNvSpPr/>
           <p:nvPr/>
         </p:nvSpPr>
@@ -1538,7 +1539,7 @@
           <a:ln w="25400">
             <a:solidFill>
               <a:srgbClr val="F6C85F">
-                <a:alpha val="78000"/>
+                <a:alpha val="90000"/>
               </a:srgbClr>
             </a:solidFill>
             <a:prstDash val="solid"/>
@@ -1547,14 +1548,14 @@
       </p:sp>
       <p:sp>
         <p:nvSpPr>
-          <p:cNvPr id="22" name="Text 20"/>
+          <p:cNvPr id="22" name="Text 19"/>
           <p:cNvSpPr/>
           <p:nvPr/>
         </p:nvSpPr>
         <p:spPr>
           <a:xfrm>
             <a:off x="2441448" y="5111496"/>
-            <a:ext cx="1527048" cy="329184"/>
+            <a:ext cx="1545336" cy="329184"/>
           </a:xfrm>
           <a:prstGeom prst="rect">
             <a:avLst/>
@@ -1572,30 +1573,30 @@
               <a:buNone/>
             </a:pPr>
             <a:r>
-              <a:rPr lang="en-US" sz="1800" b="1" dirty="0">
+              <a:rPr lang="en-US" sz="1850" b="1" dirty="0">
                 <a:solidFill>
                   <a:srgbClr val="F6C85F"/>
                 </a:solidFill>
-                <a:latin typeface="PingFang SC" pitchFamily="34" charset="0"/>
-                <a:ea typeface="PingFang SC" pitchFamily="34" charset="-122"/>
-                <a:cs typeface="PingFang SC" pitchFamily="34" charset="-120"/>
+                <a:latin typeface="Heiti SC" pitchFamily="34" charset="0"/>
+                <a:ea typeface="Heiti SC" pitchFamily="34" charset="-122"/>
+                <a:cs typeface="Heiti SC" pitchFamily="34" charset="-120"/>
               </a:rPr>
               <a:t>18月</a:t>
             </a:r>
-            <a:endParaRPr lang="en-US" sz="1800" dirty="0"/>
+            <a:endParaRPr lang="en-US" sz="1850" dirty="0"/>
           </a:p>
         </p:txBody>
       </p:sp>
       <p:sp>
         <p:nvSpPr>
-          <p:cNvPr id="23" name="Text 21"/>
+          <p:cNvPr id="23" name="Text 20"/>
           <p:cNvSpPr/>
           <p:nvPr/>
         </p:nvSpPr>
         <p:spPr>
           <a:xfrm>
             <a:off x="2441448" y="5477256"/>
-            <a:ext cx="1527048" cy="228600"/>
+            <a:ext cx="1545336" cy="228600"/>
           </a:xfrm>
           <a:prstGeom prst="rect">
             <a:avLst/>
@@ -1615,7 +1616,7 @@
             <a:r>
               <a:rPr lang="en-US" sz="700" b="1" dirty="0">
                 <a:solidFill>
-                  <a:srgbClr val="FFFFFF"/>
+                  <a:srgbClr val="E6EEF8"/>
                 </a:solidFill>
                 <a:latin typeface="PingFang SC" pitchFamily="34" charset="0"/>
                 <a:ea typeface="PingFang SC" pitchFamily="34" charset="-122"/>
@@ -1629,7 +1630,7 @@
       </p:sp>
       <p:sp>
         <p:nvSpPr>
-          <p:cNvPr id="24" name="Shape 22"/>
+          <p:cNvPr id="24" name="Shape 21"/>
           <p:cNvSpPr/>
           <p:nvPr/>
         </p:nvSpPr>
@@ -1644,8 +1645,8 @@
           <a:noFill/>
           <a:ln w="25400">
             <a:solidFill>
-              <a:srgbClr val="08111F">
-                <a:alpha val="78000"/>
+              <a:srgbClr val="F6C85F">
+                <a:alpha val="90000"/>
               </a:srgbClr>
             </a:solidFill>
             <a:prstDash val="solid"/>
@@ -1654,14 +1655,14 @@
       </p:sp>
       <p:sp>
         <p:nvSpPr>
-          <p:cNvPr id="25" name="Text 23"/>
+          <p:cNvPr id="25" name="Text 22"/>
           <p:cNvSpPr/>
           <p:nvPr/>
         </p:nvSpPr>
         <p:spPr>
           <a:xfrm>
             <a:off x="4133088" y="5111496"/>
-            <a:ext cx="1527048" cy="329184"/>
+            <a:ext cx="1545336" cy="329184"/>
           </a:xfrm>
           <a:prstGeom prst="rect">
             <a:avLst/>
@@ -1679,30 +1680,30 @@
               <a:buNone/>
             </a:pPr>
             <a:r>
-              <a:rPr lang="en-US" sz="1800" b="1" dirty="0">
+              <a:rPr lang="en-US" sz="1850" b="1" dirty="0">
                 <a:solidFill>
-                  <a:srgbClr val="08111F"/>
+                  <a:srgbClr val="F6C85F"/>
                 </a:solidFill>
-                <a:latin typeface="PingFang SC" pitchFamily="34" charset="0"/>
-                <a:ea typeface="PingFang SC" pitchFamily="34" charset="-122"/>
-                <a:cs typeface="PingFang SC" pitchFamily="34" charset="-120"/>
+                <a:latin typeface="Heiti SC" pitchFamily="34" charset="0"/>
+                <a:ea typeface="Heiti SC" pitchFamily="34" charset="-122"/>
+                <a:cs typeface="Heiti SC" pitchFamily="34" charset="-120"/>
               </a:rPr>
               <a:t>4x</a:t>
             </a:r>
-            <a:endParaRPr lang="en-US" sz="1800" dirty="0"/>
+            <a:endParaRPr lang="en-US" sz="1850" dirty="0"/>
           </a:p>
         </p:txBody>
       </p:sp>
       <p:sp>
         <p:nvSpPr>
-          <p:cNvPr id="26" name="Text 24"/>
+          <p:cNvPr id="26" name="Text 23"/>
           <p:cNvSpPr/>
           <p:nvPr/>
         </p:nvSpPr>
         <p:spPr>
           <a:xfrm>
             <a:off x="4133088" y="5477256"/>
-            <a:ext cx="1527048" cy="228600"/>
+            <a:ext cx="1545336" cy="228600"/>
           </a:xfrm>
           <a:prstGeom prst="rect">
             <a:avLst/>
@@ -1722,7 +1723,7 @@
             <a:r>
               <a:rPr lang="en-US" sz="700" b="1" dirty="0">
                 <a:solidFill>
-                  <a:srgbClr val="FFFFFF"/>
+                  <a:srgbClr val="E6EEF8"/>
                 </a:solidFill>
                 <a:latin typeface="PingFang SC" pitchFamily="34" charset="0"/>
                 <a:ea typeface="PingFang SC" pitchFamily="34" charset="-122"/>
@@ -1736,14 +1737,14 @@
       </p:sp>
       <p:sp>
         <p:nvSpPr>
-          <p:cNvPr id="27" name="Text 25"/>
-          <p:cNvSpPr/>
-          <p:nvPr/>
-        </p:nvSpPr>
-        <p:spPr>
-          <a:xfrm>
-            <a:off x="6565392" y="1399032"/>
-            <a:ext cx="2011680" cy="237744"/>
+          <p:cNvPr id="27" name="Text 24"/>
+          <p:cNvSpPr/>
+          <p:nvPr/>
+        </p:nvSpPr>
+        <p:spPr>
+          <a:xfrm>
+            <a:off x="6629400" y="1572768"/>
+            <a:ext cx="2377440" cy="237744"/>
           </a:xfrm>
           <a:prstGeom prst="rect">
             <a:avLst/>
@@ -1769,7 +1770,7 @@
                 <a:ea typeface="PingFang SC" pitchFamily="34" charset="-122"/>
                 <a:cs typeface="PingFang SC" pitchFamily="34" charset="-120"/>
               </a:rPr>
-              <a:t>趋势指数</a:t>
+              <a:t>增长故事</a:t>
             </a:r>
             <a:endParaRPr lang="en-US" sz="1240" dirty="0"/>
           </a:p>
@@ -1777,14 +1778,14 @@
       </p:sp>
       <p:sp>
         <p:nvSpPr>
-          <p:cNvPr id="28" name="Shape 26"/>
-          <p:cNvSpPr/>
-          <p:nvPr/>
-        </p:nvSpPr>
-        <p:spPr>
-          <a:xfrm>
-            <a:off x="6565392" y="1783080"/>
-            <a:ext cx="4069080" cy="0"/>
+          <p:cNvPr id="28" name="Shape 25"/>
+          <p:cNvSpPr/>
+          <p:nvPr/>
+        </p:nvSpPr>
+        <p:spPr>
+          <a:xfrm>
+            <a:off x="6419088" y="1773936"/>
+            <a:ext cx="3968496" cy="0"/>
           </a:xfrm>
           <a:prstGeom prst="line">
             <a:avLst/>
@@ -1792,7 +1793,7 @@
           <a:noFill/>
           <a:ln w="15240">
             <a:solidFill>
-              <a:srgbClr val="08111F">
+              <a:srgbClr val="F6C85F">
                 <a:alpha val="65000"/>
               </a:srgbClr>
             </a:solidFill>
@@ -1802,14 +1803,14 @@
       </p:sp>
       <p:sp>
         <p:nvSpPr>
-          <p:cNvPr id="29" name="Shape 27"/>
-          <p:cNvSpPr/>
-          <p:nvPr/>
-        </p:nvSpPr>
-        <p:spPr>
-          <a:xfrm>
-            <a:off x="6492240" y="4882896"/>
-            <a:ext cx="4069080" cy="0"/>
+          <p:cNvPr id="29" name="Shape 26"/>
+          <p:cNvSpPr/>
+          <p:nvPr/>
+        </p:nvSpPr>
+        <p:spPr>
+          <a:xfrm>
+            <a:off x="6419088" y="4956048"/>
+            <a:ext cx="3968496" cy="0"/>
           </a:xfrm>
           <a:prstGeom prst="line">
             <a:avLst/>
@@ -1827,14 +1828,43 @@
       </p:sp>
       <p:sp>
         <p:nvSpPr>
-          <p:cNvPr id="30" name="Shape 28"/>
-          <p:cNvSpPr/>
-          <p:nvPr/>
-        </p:nvSpPr>
-        <p:spPr>
-          <a:xfrm>
-            <a:off x="6693408" y="3734592"/>
-            <a:ext cx="765810" cy="1148304"/>
+          <p:cNvPr id="30" name="Shape 27"/>
+          <p:cNvSpPr/>
+          <p:nvPr/>
+        </p:nvSpPr>
+        <p:spPr>
+          <a:xfrm>
+            <a:off x="6592824" y="4272808"/>
+            <a:ext cx="795528" cy="683240"/>
+          </a:xfrm>
+          <a:prstGeom prst="rect">
+            <a:avLst/>
+          </a:prstGeom>
+          <a:solidFill>
+            <a:srgbClr val="08111F">
+              <a:alpha val="32000"/>
+            </a:srgbClr>
+          </a:solidFill>
+          <a:ln w="12700">
+            <a:solidFill>
+              <a:srgbClr val="333333">
+                <a:alpha val="0"/>
+              </a:srgbClr>
+            </a:solidFill>
+            <a:prstDash val="solid"/>
+          </a:ln>
+        </p:spPr>
+      </p:sp>
+      <p:sp>
+        <p:nvSpPr>
+          <p:cNvPr id="31" name="Shape 28"/>
+          <p:cNvSpPr/>
+          <p:nvPr/>
+        </p:nvSpPr>
+        <p:spPr>
+          <a:xfrm>
+            <a:off x="6620256" y="4300240"/>
+            <a:ext cx="740664" cy="655808"/>
           </a:xfrm>
           <a:prstGeom prst="rect">
             <a:avLst/>
@@ -1854,14 +1884,14 @@
       </p:sp>
       <p:sp>
         <p:nvSpPr>
-          <p:cNvPr id="31" name="Text 29"/>
-          <p:cNvSpPr/>
-          <p:nvPr/>
-        </p:nvSpPr>
-        <p:spPr>
-          <a:xfrm>
-            <a:off x="6656832" y="5010912"/>
-            <a:ext cx="838962" cy="164592"/>
+          <p:cNvPr id="32" name="Text 29"/>
+          <p:cNvSpPr/>
+          <p:nvPr/>
+        </p:nvSpPr>
+        <p:spPr>
+          <a:xfrm>
+            <a:off x="6583680" y="5084064"/>
+            <a:ext cx="813816" cy="164592"/>
           </a:xfrm>
           <a:prstGeom prst="rect">
             <a:avLst/>
@@ -1895,14 +1925,43 @@
       </p:sp>
       <p:sp>
         <p:nvSpPr>
-          <p:cNvPr id="32" name="Shape 30"/>
-          <p:cNvSpPr/>
-          <p:nvPr/>
-        </p:nvSpPr>
-        <p:spPr>
-          <a:xfrm>
-            <a:off x="7660386" y="3133100"/>
-            <a:ext cx="765810" cy="1749796"/>
+          <p:cNvPr id="33" name="Shape 30"/>
+          <p:cNvSpPr/>
+          <p:nvPr/>
+        </p:nvSpPr>
+        <p:spPr>
+          <a:xfrm>
+            <a:off x="7534656" y="3587191"/>
+            <a:ext cx="795528" cy="1368857"/>
+          </a:xfrm>
+          <a:prstGeom prst="rect">
+            <a:avLst/>
+          </a:prstGeom>
+          <a:solidFill>
+            <a:srgbClr val="F6C85F">
+              <a:alpha val="32000"/>
+            </a:srgbClr>
+          </a:solidFill>
+          <a:ln w="12700">
+            <a:solidFill>
+              <a:srgbClr val="333333">
+                <a:alpha val="0"/>
+              </a:srgbClr>
+            </a:solidFill>
+            <a:prstDash val="solid"/>
+          </a:ln>
+        </p:spPr>
+      </p:sp>
+      <p:sp>
+        <p:nvSpPr>
+          <p:cNvPr id="34" name="Shape 31"/>
+          <p:cNvSpPr/>
+          <p:nvPr/>
+        </p:nvSpPr>
+        <p:spPr>
+          <a:xfrm>
+            <a:off x="7562088" y="3614623"/>
+            <a:ext cx="740664" cy="1341425"/>
           </a:xfrm>
           <a:prstGeom prst="rect">
             <a:avLst/>
@@ -1922,14 +1981,14 @@
       </p:sp>
       <p:sp>
         <p:nvSpPr>
-          <p:cNvPr id="33" name="Text 31"/>
-          <p:cNvSpPr/>
-          <p:nvPr/>
-        </p:nvSpPr>
-        <p:spPr>
-          <a:xfrm>
-            <a:off x="7623810" y="5010912"/>
-            <a:ext cx="838962" cy="164592"/>
+          <p:cNvPr id="35" name="Text 32"/>
+          <p:cNvSpPr/>
+          <p:nvPr/>
+        </p:nvSpPr>
+        <p:spPr>
+          <a:xfrm>
+            <a:off x="7525512" y="5084064"/>
+            <a:ext cx="813816" cy="164592"/>
           </a:xfrm>
           <a:prstGeom prst="rect">
             <a:avLst/>
@@ -1963,14 +2022,43 @@
       </p:sp>
       <p:sp>
         <p:nvSpPr>
-          <p:cNvPr id="34" name="Shape 32"/>
-          <p:cNvSpPr/>
-          <p:nvPr/>
-        </p:nvSpPr>
-        <p:spPr>
-          <a:xfrm>
-            <a:off x="8627364" y="2750332"/>
-            <a:ext cx="765810" cy="2132564"/>
+          <p:cNvPr id="36" name="Shape 33"/>
+          <p:cNvSpPr/>
+          <p:nvPr/>
+        </p:nvSpPr>
+        <p:spPr>
+          <a:xfrm>
+            <a:off x="8476488" y="3050621"/>
+            <a:ext cx="795528" cy="1905427"/>
+          </a:xfrm>
+          <a:prstGeom prst="rect">
+            <a:avLst/>
+          </a:prstGeom>
+          <a:solidFill>
+            <a:srgbClr val="08111F">
+              <a:alpha val="32000"/>
+            </a:srgbClr>
+          </a:solidFill>
+          <a:ln w="12700">
+            <a:solidFill>
+              <a:srgbClr val="333333">
+                <a:alpha val="0"/>
+              </a:srgbClr>
+            </a:solidFill>
+            <a:prstDash val="solid"/>
+          </a:ln>
+        </p:spPr>
+      </p:sp>
+      <p:sp>
+        <p:nvSpPr>
+          <p:cNvPr id="37" name="Shape 34"/>
+          <p:cNvSpPr/>
+          <p:nvPr/>
+        </p:nvSpPr>
+        <p:spPr>
+          <a:xfrm>
+            <a:off x="8503920" y="3078053"/>
+            <a:ext cx="740664" cy="1877995"/>
           </a:xfrm>
           <a:prstGeom prst="rect">
             <a:avLst/>
@@ -1990,14 +2078,14 @@
       </p:sp>
       <p:sp>
         <p:nvSpPr>
-          <p:cNvPr id="35" name="Text 33"/>
-          <p:cNvSpPr/>
-          <p:nvPr/>
-        </p:nvSpPr>
-        <p:spPr>
-          <a:xfrm>
-            <a:off x="8590788" y="5010912"/>
-            <a:ext cx="838962" cy="164592"/>
+          <p:cNvPr id="38" name="Text 35"/>
+          <p:cNvSpPr/>
+          <p:nvPr/>
+        </p:nvSpPr>
+        <p:spPr>
+          <a:xfrm>
+            <a:off x="8467344" y="5084064"/>
+            <a:ext cx="813816" cy="164592"/>
           </a:xfrm>
           <a:prstGeom prst="rect">
             <a:avLst/>
@@ -2031,14 +2119,43 @@
       </p:sp>
       <p:sp>
         <p:nvSpPr>
-          <p:cNvPr id="36" name="Shape 34"/>
-          <p:cNvSpPr/>
-          <p:nvPr/>
-        </p:nvSpPr>
-        <p:spPr>
-          <a:xfrm>
-            <a:off x="9594342" y="2394905"/>
-            <a:ext cx="765810" cy="2487991"/>
+          <p:cNvPr id="39" name="Shape 36"/>
+          <p:cNvSpPr/>
+          <p:nvPr/>
+        </p:nvSpPr>
+        <p:spPr>
+          <a:xfrm>
+            <a:off x="9418320" y="2514051"/>
+            <a:ext cx="795528" cy="2441997"/>
+          </a:xfrm>
+          <a:prstGeom prst="rect">
+            <a:avLst/>
+          </a:prstGeom>
+          <a:solidFill>
+            <a:srgbClr val="F6C85F">
+              <a:alpha val="32000"/>
+            </a:srgbClr>
+          </a:solidFill>
+          <a:ln w="12700">
+            <a:solidFill>
+              <a:srgbClr val="333333">
+                <a:alpha val="0"/>
+              </a:srgbClr>
+            </a:solidFill>
+            <a:prstDash val="solid"/>
+          </a:ln>
+        </p:spPr>
+      </p:sp>
+      <p:sp>
+        <p:nvSpPr>
+          <p:cNvPr id="40" name="Shape 37"/>
+          <p:cNvSpPr/>
+          <p:nvPr/>
+        </p:nvSpPr>
+        <p:spPr>
+          <a:xfrm>
+            <a:off x="9445752" y="2541483"/>
+            <a:ext cx="740664" cy="2414565"/>
           </a:xfrm>
           <a:prstGeom prst="rect">
             <a:avLst/>
@@ -2058,14 +2175,14 @@
       </p:sp>
       <p:sp>
         <p:nvSpPr>
-          <p:cNvPr id="37" name="Text 35"/>
-          <p:cNvSpPr/>
-          <p:nvPr/>
-        </p:nvSpPr>
-        <p:spPr>
-          <a:xfrm>
-            <a:off x="9557766" y="5010912"/>
-            <a:ext cx="838962" cy="164592"/>
+          <p:cNvPr id="41" name="Text 38"/>
+          <p:cNvSpPr/>
+          <p:nvPr/>
+        </p:nvSpPr>
+        <p:spPr>
+          <a:xfrm>
+            <a:off x="9409176" y="5084064"/>
+            <a:ext cx="813816" cy="164592"/>
           </a:xfrm>
           <a:prstGeom prst="rect">
             <a:avLst/>
@@ -2094,6 +2211,296 @@
               <a:t>规模</a:t>
             </a:r>
             <a:endParaRPr lang="en-US" sz="680" dirty="0"/>
+          </a:p>
+        </p:txBody>
+      </p:sp>
+      <p:sp>
+        <p:nvSpPr>
+          <p:cNvPr id="42" name="Shape 39"/>
+          <p:cNvSpPr/>
+          <p:nvPr/>
+        </p:nvSpPr>
+        <p:spPr>
+          <a:xfrm>
+            <a:off x="6944868" y="4217944"/>
+            <a:ext cx="91440" cy="91440"/>
+          </a:xfrm>
+          <a:prstGeom prst="ellipse">
+            <a:avLst/>
+          </a:prstGeom>
+          <a:solidFill>
+            <a:srgbClr val="08111F"/>
+          </a:solidFill>
+          <a:ln w="12700">
+            <a:solidFill>
+              <a:srgbClr val="333333">
+                <a:alpha val="0"/>
+              </a:srgbClr>
+            </a:solidFill>
+            <a:prstDash val="solid"/>
+          </a:ln>
+        </p:spPr>
+      </p:sp>
+      <p:sp>
+        <p:nvSpPr>
+          <p:cNvPr id="43" name="Shape 40"/>
+          <p:cNvSpPr/>
+          <p:nvPr/>
+        </p:nvSpPr>
+        <p:spPr>
+          <a:xfrm>
+            <a:off x="7886700" y="3532327"/>
+            <a:ext cx="91440" cy="91440"/>
+          </a:xfrm>
+          <a:prstGeom prst="ellipse">
+            <a:avLst/>
+          </a:prstGeom>
+          <a:solidFill>
+            <a:srgbClr val="08111F"/>
+          </a:solidFill>
+          <a:ln w="12700">
+            <a:solidFill>
+              <a:srgbClr val="333333">
+                <a:alpha val="0"/>
+              </a:srgbClr>
+            </a:solidFill>
+            <a:prstDash val="solid"/>
+          </a:ln>
+        </p:spPr>
+      </p:sp>
+      <p:sp>
+        <p:nvSpPr>
+          <p:cNvPr id="44" name="Shape 41"/>
+          <p:cNvSpPr/>
+          <p:nvPr/>
+        </p:nvSpPr>
+        <p:spPr>
+          <a:xfrm>
+            <a:off x="8828532" y="2995757"/>
+            <a:ext cx="91440" cy="91440"/>
+          </a:xfrm>
+          <a:prstGeom prst="ellipse">
+            <a:avLst/>
+          </a:prstGeom>
+          <a:solidFill>
+            <a:srgbClr val="08111F"/>
+          </a:solidFill>
+          <a:ln w="12700">
+            <a:solidFill>
+              <a:srgbClr val="333333">
+                <a:alpha val="0"/>
+              </a:srgbClr>
+            </a:solidFill>
+            <a:prstDash val="solid"/>
+          </a:ln>
+        </p:spPr>
+      </p:sp>
+      <p:sp>
+        <p:nvSpPr>
+          <p:cNvPr id="45" name="Shape 42"/>
+          <p:cNvSpPr/>
+          <p:nvPr/>
+        </p:nvSpPr>
+        <p:spPr>
+          <a:xfrm>
+            <a:off x="9770364" y="2459187"/>
+            <a:ext cx="91440" cy="91440"/>
+          </a:xfrm>
+          <a:prstGeom prst="ellipse">
+            <a:avLst/>
+          </a:prstGeom>
+          <a:solidFill>
+            <a:srgbClr val="08111F"/>
+          </a:solidFill>
+          <a:ln w="12700">
+            <a:solidFill>
+              <a:srgbClr val="333333">
+                <a:alpha val="0"/>
+              </a:srgbClr>
+            </a:solidFill>
+            <a:prstDash val="solid"/>
+          </a:ln>
+        </p:spPr>
+      </p:sp>
+      <p:sp>
+        <p:nvSpPr>
+          <p:cNvPr id="46" name="Shape 43"/>
+          <p:cNvSpPr/>
+          <p:nvPr/>
+        </p:nvSpPr>
+        <p:spPr>
+          <a:xfrm>
+            <a:off x="6990588" y="4263664"/>
+            <a:ext cx="941832" cy="-685617"/>
+          </a:xfrm>
+          <a:prstGeom prst="line">
+            <a:avLst/>
+          </a:prstGeom>
+          <a:noFill/>
+          <a:ln w="17780">
+            <a:solidFill>
+              <a:srgbClr val="08111F">
+                <a:alpha val="92000"/>
+              </a:srgbClr>
+            </a:solidFill>
+            <a:prstDash val="solid"/>
+          </a:ln>
+        </p:spPr>
+      </p:sp>
+      <p:sp>
+        <p:nvSpPr>
+          <p:cNvPr id="47" name="Shape 44"/>
+          <p:cNvSpPr/>
+          <p:nvPr/>
+        </p:nvSpPr>
+        <p:spPr>
+          <a:xfrm>
+            <a:off x="7932420" y="3578047"/>
+            <a:ext cx="941832" cy="-536570"/>
+          </a:xfrm>
+          <a:prstGeom prst="line">
+            <a:avLst/>
+          </a:prstGeom>
+          <a:noFill/>
+          <a:ln w="17780">
+            <a:solidFill>
+              <a:srgbClr val="08111F">
+                <a:alpha val="92000"/>
+              </a:srgbClr>
+            </a:solidFill>
+            <a:prstDash val="solid"/>
+          </a:ln>
+        </p:spPr>
+      </p:sp>
+      <p:sp>
+        <p:nvSpPr>
+          <p:cNvPr id="48" name="Shape 45"/>
+          <p:cNvSpPr/>
+          <p:nvPr/>
+        </p:nvSpPr>
+        <p:spPr>
+          <a:xfrm>
+            <a:off x="8874252" y="3041477"/>
+            <a:ext cx="941832" cy="-536570"/>
+          </a:xfrm>
+          <a:prstGeom prst="line">
+            <a:avLst/>
+          </a:prstGeom>
+          <a:noFill/>
+          <a:ln w="17780">
+            <a:solidFill>
+              <a:srgbClr val="08111F">
+                <a:alpha val="92000"/>
+              </a:srgbClr>
+            </a:solidFill>
+            <a:prstDash val="solid"/>
+          </a:ln>
+        </p:spPr>
+      </p:sp>
+      <p:sp>
+        <p:nvSpPr>
+          <p:cNvPr id="49" name="Shape 46"/>
+          <p:cNvSpPr/>
+          <p:nvPr/>
+        </p:nvSpPr>
+        <p:spPr>
+          <a:xfrm>
+            <a:off x="8046720" y="6254496"/>
+            <a:ext cx="475488" cy="0"/>
+          </a:xfrm>
+          <a:prstGeom prst="line">
+            <a:avLst/>
+          </a:prstGeom>
+          <a:noFill/>
+          <a:ln w="19050">
+            <a:solidFill>
+              <a:srgbClr val="08111F">
+                <a:alpha val="90000"/>
+              </a:srgbClr>
+            </a:solidFill>
+            <a:prstDash val="solid"/>
+          </a:ln>
+        </p:spPr>
+      </p:sp>
+      <p:sp>
+        <p:nvSpPr>
+          <p:cNvPr id="50" name="Text 47"/>
+          <p:cNvSpPr/>
+          <p:nvPr/>
+        </p:nvSpPr>
+        <p:spPr>
+          <a:xfrm>
+            <a:off x="8668512" y="6163056"/>
+            <a:ext cx="2560320" cy="164592"/>
+          </a:xfrm>
+          <a:prstGeom prst="rect">
+            <a:avLst/>
+          </a:prstGeom>
+          <a:noFill/>
+          <a:ln/>
+        </p:spPr>
+        <p:txBody>
+          <a:bodyPr wrap="square" lIns="0" tIns="0" rIns="0" bIns="0" rtlCol="0" anchor="ctr">
+            <a:normAutofit/>
+          </a:bodyPr>
+          <a:lstStyle/>
+          <a:p>
+            <a:pPr algn="l" indent="0" marL="0">
+              <a:buNone/>
+            </a:pPr>
+            <a:r>
+              <a:rPr lang="en-US" sz="740" dirty="0">
+                <a:solidFill>
+                  <a:srgbClr val="A7C3D9"/>
+                </a:solidFill>
+                <a:latin typeface="PingFang SC" pitchFamily="34" charset="0"/>
+                <a:ea typeface="PingFang SC" pitchFamily="34" charset="-122"/>
+                <a:cs typeface="PingFang SC" pitchFamily="34" charset="-120"/>
+              </a:rPr>
+              <a:t>文字、数字和图表标签均为 PPT 可编辑对象</a:t>
+            </a:r>
+            <a:endParaRPr lang="en-US" sz="740" dirty="0"/>
+          </a:p>
+        </p:txBody>
+      </p:sp>
+      <p:sp>
+        <p:nvSpPr>
+          <p:cNvPr id="51" name="Text 48"/>
+          <p:cNvSpPr/>
+          <p:nvPr/>
+        </p:nvSpPr>
+        <p:spPr>
+          <a:xfrm>
+            <a:off x="9875520" y="6291072"/>
+            <a:ext cx="914400" cy="146304"/>
+          </a:xfrm>
+          <a:prstGeom prst="rect">
+            <a:avLst/>
+          </a:prstGeom>
+          <a:noFill/>
+          <a:ln/>
+        </p:spPr>
+        <p:txBody>
+          <a:bodyPr wrap="square" lIns="0" tIns="0" rIns="0" bIns="0" rtlCol="0" anchor="ctr">
+            <a:normAutofit/>
+          </a:bodyPr>
+          <a:lstStyle/>
+          <a:p>
+            <a:pPr algn="r" indent="0" marL="0">
+              <a:buNone/>
+            </a:pPr>
+            <a:r>
+              <a:rPr lang="en-US" sz="720" b="1" dirty="0">
+                <a:solidFill>
+                  <a:srgbClr val="08111F"/>
+                </a:solidFill>
+                <a:latin typeface="Avenir Next" pitchFamily="34" charset="0"/>
+                <a:ea typeface="Avenir Next" pitchFamily="34" charset="-122"/>
+                <a:cs typeface="Avenir Next" pitchFamily="34" charset="-120"/>
+              </a:rPr>
+              <a:t>投资人叙事</a:t>
+            </a:r>
+            <a:endParaRPr lang="en-US" sz="720" dirty="0"/>
           </a:p>
         </p:txBody>
       </p:sp>
